--- a/practice/bai-3-thuong-mai.pptx
+++ b/practice/bai-3-thuong-mai.pptx
@@ -8080,108 +8080,14 @@
     </a:clrScheme>
     <a:fontScheme name="Office">
       <a:majorFont>
-        <a:latin typeface="Calibri Light" panose="020F0302020204030204"/>
-        <a:ea typeface=""/>
-        <a:cs typeface=""/>
-        <a:font script="Jpan" typeface="游ゴシック Light"/>
-        <a:font script="Hang" typeface="맑은 고딕"/>
-        <a:font script="Hans" typeface="等线 Light"/>
-        <a:font script="Hant" typeface="新細明體"/>
-        <a:font script="Arab" typeface="Times New Roman"/>
-        <a:font script="Hebr" typeface="Times New Roman"/>
-        <a:font script="Thai" typeface="Angsana New"/>
-        <a:font script="Ethi" typeface="Nyala"/>
-        <a:font script="Beng" typeface="Vrinda"/>
-        <a:font script="Gujr" typeface="Shruti"/>
-        <a:font script="Khmr" typeface="MoolBoran"/>
-        <a:font script="Knda" typeface="Tunga"/>
-        <a:font script="Guru" typeface="Raavi"/>
-        <a:font script="Cans" typeface="Euphemia"/>
-        <a:font script="Cher" typeface="Plantagenet Cherokee"/>
-        <a:font script="Yiii" typeface="Microsoft Yi Baiti"/>
-        <a:font script="Tibt" typeface="Microsoft Himalaya"/>
-        <a:font script="Thaa" typeface="MV Boli"/>
-        <a:font script="Deva" typeface="Mangal"/>
-        <a:font script="Telu" typeface="Gautami"/>
-        <a:font script="Taml" typeface="Latha"/>
-        <a:font script="Syrc" typeface="Estrangelo Edessa"/>
-        <a:font script="Orya" typeface="Kalinga"/>
-        <a:font script="Mlym" typeface="Kartika"/>
-        <a:font script="Laoo" typeface="DokChampa"/>
-        <a:font script="Sinh" typeface="Iskoola Pota"/>
-        <a:font script="Mong" typeface="Mongolian Baiti"/>
-        <a:font script="Viet" typeface="Times New Roman"/>
-        <a:font script="Uigh" typeface="Microsoft Uighur"/>
-        <a:font script="Geor" typeface="Sylfaen"/>
-        <a:font script="Armn" typeface="Arial"/>
-        <a:font script="Bugi" typeface="Leelawadee UI"/>
-        <a:font script="Bopo" typeface="Microsoft JhengHei"/>
-        <a:font script="Java" typeface="Javanese Text"/>
-        <a:font script="Lisu" typeface="Segoe UI"/>
-        <a:font script="Mymr" typeface="Myanmar Text"/>
-        <a:font script="Nkoo" typeface="Ebrima"/>
-        <a:font script="Olck" typeface="Nirmala UI"/>
-        <a:font script="Osma" typeface="Ebrima"/>
-        <a:font script="Phag" typeface="Phagspa"/>
-        <a:font script="Syrn" typeface="Estrangelo Edessa"/>
-        <a:font script="Syrj" typeface="Estrangelo Edessa"/>
-        <a:font script="Syre" typeface="Estrangelo Edessa"/>
-        <a:font script="Sora" typeface="Nirmala UI"/>
-        <a:font script="Tale" typeface="Microsoft Tai Le"/>
-        <a:font script="Talu" typeface="Microsoft New Tai Lue"/>
-        <a:font script="Tfng" typeface="Ebrima"/>
+        <a:latin typeface="Cambria" panose="020F0302020204030204"/>
+        <a:ea typeface="Cambria"/>
+        <a:cs typeface="Cambria"/>
       </a:majorFont>
       <a:minorFont>
         <a:latin typeface="Calibri" panose="020F0502020204030204"/>
-        <a:ea typeface=""/>
-        <a:cs typeface=""/>
-        <a:font script="Jpan" typeface="游ゴシック"/>
-        <a:font script="Hang" typeface="맑은 고딕"/>
-        <a:font script="Hans" typeface="等线"/>
-        <a:font script="Hant" typeface="新細明體"/>
-        <a:font script="Arab" typeface="Arial"/>
-        <a:font script="Hebr" typeface="Arial"/>
-        <a:font script="Thai" typeface="Cordia New"/>
-        <a:font script="Ethi" typeface="Nyala"/>
-        <a:font script="Beng" typeface="Vrinda"/>
-        <a:font script="Gujr" typeface="Shruti"/>
-        <a:font script="Khmr" typeface="DaunPenh"/>
-        <a:font script="Knda" typeface="Tunga"/>
-        <a:font script="Guru" typeface="Raavi"/>
-        <a:font script="Cans" typeface="Euphemia"/>
-        <a:font script="Cher" typeface="Plantagenet Cherokee"/>
-        <a:font script="Yiii" typeface="Microsoft Yi Baiti"/>
-        <a:font script="Tibt" typeface="Microsoft Himalaya"/>
-        <a:font script="Thaa" typeface="MV Boli"/>
-        <a:font script="Deva" typeface="Mangal"/>
-        <a:font script="Telu" typeface="Gautami"/>
-        <a:font script="Taml" typeface="Latha"/>
-        <a:font script="Syrc" typeface="Estrangelo Edessa"/>
-        <a:font script="Orya" typeface="Kalinga"/>
-        <a:font script="Mlym" typeface="Kartika"/>
-        <a:font script="Laoo" typeface="DokChampa"/>
-        <a:font script="Sinh" typeface="Iskoola Pota"/>
-        <a:font script="Mong" typeface="Mongolian Baiti"/>
-        <a:font script="Viet" typeface="Arial"/>
-        <a:font script="Uigh" typeface="Microsoft Uighur"/>
-        <a:font script="Geor" typeface="Sylfaen"/>
-        <a:font script="Armn" typeface="Arial"/>
-        <a:font script="Bugi" typeface="Leelawadee UI"/>
-        <a:font script="Bopo" typeface="Microsoft JhengHei"/>
-        <a:font script="Java" typeface="Javanese Text"/>
-        <a:font script="Lisu" typeface="Segoe UI"/>
-        <a:font script="Mymr" typeface="Myanmar Text"/>
-        <a:font script="Nkoo" typeface="Ebrima"/>
-        <a:font script="Olck" typeface="Nirmala UI"/>
-        <a:font script="Osma" typeface="Ebrima"/>
-        <a:font script="Phag" typeface="Phagspa"/>
-        <a:font script="Syrn" typeface="Estrangelo Edessa"/>
-        <a:font script="Syrj" typeface="Estrangelo Edessa"/>
-        <a:font script="Syre" typeface="Estrangelo Edessa"/>
-        <a:font script="Sora" typeface="Nirmala UI"/>
-        <a:font script="Tale" typeface="Microsoft Tai Le"/>
-        <a:font script="Talu" typeface="Microsoft New Tai Lue"/>
-        <a:font script="Tfng" typeface="Ebrima"/>
+        <a:ea typeface="Calibri"/>
+        <a:cs typeface="Calibri"/>
       </a:minorFont>
     </a:fontScheme>
     <a:fmtScheme name="Office">

--- a/practice/bai-3-thuong-mai.pptx
+++ b/practice/bai-3-thuong-mai.pptx
@@ -3595,7 +3595,7 @@
         <p:spPr>
           <a:xfrm>
             <a:off x="1051560" y="1545336"/>
-            <a:ext cx="10652760" cy="1508760"/>
+            <a:ext cx="10652760" cy="960120"/>
           </a:xfrm>
           <a:prstGeom prst="rect">
             <a:avLst/>
@@ -3647,7 +3647,7 @@
         </p:nvSpPr>
         <p:spPr>
           <a:xfrm>
-            <a:off x="502920" y="3127248"/>
+            <a:off x="502920" y="2578608"/>
             <a:ext cx="384048" cy="384048"/>
           </a:xfrm>
           <a:prstGeom prst="ellipse">
@@ -3671,7 +3671,7 @@
         </p:nvSpPr>
         <p:spPr>
           <a:xfrm>
-            <a:off x="502920" y="3127248"/>
+            <a:off x="502920" y="2578608"/>
             <a:ext cx="384048" cy="384048"/>
           </a:xfrm>
           <a:prstGeom prst="rect">
@@ -3710,8 +3710,8 @@
         </p:nvSpPr>
         <p:spPr>
           <a:xfrm>
-            <a:off x="1051560" y="3054096"/>
-            <a:ext cx="10652760" cy="1508760"/>
+            <a:off x="1051560" y="2505456"/>
+            <a:ext cx="10652760" cy="960120"/>
           </a:xfrm>
           <a:prstGeom prst="rect">
             <a:avLst/>
@@ -3763,7 +3763,7 @@
         </p:nvSpPr>
         <p:spPr>
           <a:xfrm>
-            <a:off x="502920" y="4636008"/>
+            <a:off x="502920" y="3538728"/>
             <a:ext cx="384048" cy="384048"/>
           </a:xfrm>
           <a:prstGeom prst="ellipse">
@@ -3787,7 +3787,7 @@
         </p:nvSpPr>
         <p:spPr>
           <a:xfrm>
-            <a:off x="502920" y="4636008"/>
+            <a:off x="502920" y="3538728"/>
             <a:ext cx="384048" cy="384048"/>
           </a:xfrm>
           <a:prstGeom prst="rect">
@@ -3826,8 +3826,8 @@
         </p:nvSpPr>
         <p:spPr>
           <a:xfrm>
-            <a:off x="1051560" y="4562856"/>
-            <a:ext cx="10652760" cy="1508760"/>
+            <a:off x="1051560" y="3465576"/>
+            <a:ext cx="10652760" cy="960120"/>
           </a:xfrm>
           <a:prstGeom prst="rect">
             <a:avLst/>
@@ -4218,7 +4218,7 @@
         <p:spPr>
           <a:xfrm>
             <a:off x="1051560" y="1545336"/>
-            <a:ext cx="10652760" cy="1508760"/>
+            <a:ext cx="10652760" cy="960120"/>
           </a:xfrm>
           <a:prstGeom prst="rect">
             <a:avLst/>
@@ -4270,7 +4270,7 @@
         </p:nvSpPr>
         <p:spPr>
           <a:xfrm>
-            <a:off x="502920" y="3127248"/>
+            <a:off x="502920" y="2578608"/>
             <a:ext cx="384048" cy="384048"/>
           </a:xfrm>
           <a:prstGeom prst="ellipse">
@@ -4294,7 +4294,7 @@
         </p:nvSpPr>
         <p:spPr>
           <a:xfrm>
-            <a:off x="502920" y="3127248"/>
+            <a:off x="502920" y="2578608"/>
             <a:ext cx="384048" cy="384048"/>
           </a:xfrm>
           <a:prstGeom prst="rect">
@@ -4333,8 +4333,8 @@
         </p:nvSpPr>
         <p:spPr>
           <a:xfrm>
-            <a:off x="1051560" y="3054096"/>
-            <a:ext cx="10652760" cy="1508760"/>
+            <a:off x="1051560" y="2505456"/>
+            <a:ext cx="10652760" cy="960120"/>
           </a:xfrm>
           <a:prstGeom prst="rect">
             <a:avLst/>
@@ -4386,7 +4386,7 @@
         </p:nvSpPr>
         <p:spPr>
           <a:xfrm>
-            <a:off x="502920" y="4636008"/>
+            <a:off x="502920" y="3538728"/>
             <a:ext cx="384048" cy="384048"/>
           </a:xfrm>
           <a:prstGeom prst="ellipse">
@@ -4410,7 +4410,7 @@
         </p:nvSpPr>
         <p:spPr>
           <a:xfrm>
-            <a:off x="502920" y="4636008"/>
+            <a:off x="502920" y="3538728"/>
             <a:ext cx="384048" cy="384048"/>
           </a:xfrm>
           <a:prstGeom prst="rect">
@@ -4449,8 +4449,8 @@
         </p:nvSpPr>
         <p:spPr>
           <a:xfrm>
-            <a:off x="1051560" y="4562856"/>
-            <a:ext cx="10652760" cy="1508760"/>
+            <a:off x="1051560" y="3465576"/>
+            <a:ext cx="10652760" cy="960120"/>
           </a:xfrm>
           <a:prstGeom prst="rect">
             <a:avLst/>

--- a/practice/bai-3-thuong-mai.pptx
+++ b/practice/bai-3-thuong-mai.pptx
@@ -1851,7 +1851,7 @@
       </p:sp>
       <p:pic>
         <p:nvPicPr>
-          <p:cNvPr id="3" name="Image 0" descr="assets/logo_tron.png">    </p:cNvPr>
+          <p:cNvPr id="3" name="Image 0" descr="/home/user/comdraft/assets/img/dau-huong.png">    </p:cNvPr>
           <p:cNvPicPr>
             <a:picLocks noChangeAspect="1"/>
           </p:cNvPicPr>
@@ -1877,7 +1877,7 @@
       </p:pic>
       <p:pic>
         <p:nvPicPr>
-          <p:cNvPr id="4" name="Image 1" descr="assets/logo_ngang.png">    </p:cNvPr>
+          <p:cNvPr id="4" name="Image 1" descr="/home/user/comdraft/assets/img/lockup-huong.png">    </p:cNvPr>
           <p:cNvPicPr>
             <a:picLocks noChangeAspect="1"/>
           </p:cNvPicPr>
@@ -2210,7 +2210,7 @@
       </p:grpSpPr>
       <p:pic>
         <p:nvPicPr>
-          <p:cNvPr id="2" name="Image 0" descr="assets/logo_tron.png">    </p:cNvPr>
+          <p:cNvPr id="2" name="Image 0" descr="/home/user/comdraft/assets/img/dau-huong.png">    </p:cNvPr>
           <p:cNvPicPr>
             <a:picLocks noChangeAspect="1"/>
           </p:cNvPicPr>
@@ -2746,7 +2746,7 @@
       </p:grpSpPr>
       <p:pic>
         <p:nvPicPr>
-          <p:cNvPr id="2" name="Image 0" descr="assets/logo_tron.png">    </p:cNvPr>
+          <p:cNvPr id="2" name="Image 0" descr="/home/user/comdraft/assets/img/dau-huong.png">    </p:cNvPr>
           <p:cNvPicPr>
             <a:picLocks noChangeAspect="1"/>
           </p:cNvPicPr>
@@ -3282,7 +3282,7 @@
       </p:grpSpPr>
       <p:pic>
         <p:nvPicPr>
-          <p:cNvPr id="2" name="Image 0" descr="assets/logo_tron.png">    </p:cNvPr>
+          <p:cNvPr id="2" name="Image 0" descr="/home/user/comdraft/assets/img/dau-huong.png">    </p:cNvPr>
           <p:cNvPicPr>
             <a:picLocks noChangeAspect="1"/>
           </p:cNvPicPr>
@@ -3905,7 +3905,7 @@
       </p:grpSpPr>
       <p:pic>
         <p:nvPicPr>
-          <p:cNvPr id="2" name="Image 0" descr="assets/logo_tron.png">    </p:cNvPr>
+          <p:cNvPr id="2" name="Image 0" descr="/home/user/comdraft/assets/img/dau-huong.png">    </p:cNvPr>
           <p:cNvPicPr>
             <a:picLocks noChangeAspect="1"/>
           </p:cNvPicPr>
@@ -4528,7 +4528,7 @@
       </p:grpSpPr>
       <p:pic>
         <p:nvPicPr>
-          <p:cNvPr id="2" name="Image 0" descr="assets/logo_tron.png">    </p:cNvPr>
+          <p:cNvPr id="2" name="Image 0" descr="/home/user/comdraft/assets/img/dau-huong.png">    </p:cNvPr>
           <p:cNvPicPr>
             <a:picLocks noChangeAspect="1"/>
           </p:cNvPicPr>
@@ -5338,7 +5338,7 @@
       </p:grpSpPr>
       <p:pic>
         <p:nvPicPr>
-          <p:cNvPr id="2" name="Image 0" descr="assets/logo_tron.png">    </p:cNvPr>
+          <p:cNvPr id="2" name="Image 0" descr="/home/user/comdraft/assets/img/dau-huong.png">    </p:cNvPr>
           <p:cNvPicPr>
             <a:picLocks noChangeAspect="1"/>
           </p:cNvPicPr>
@@ -5579,264 +5579,62 @@
           </a:p>
         </p:txBody>
       </p:sp>
-      <p:sp>
-        <p:nvSpPr>
-          <p:cNvPr id="9" name="Shape 6"/>
-          <p:cNvSpPr/>
-          <p:nvPr/>
-        </p:nvSpPr>
-        <p:spPr>
-          <a:xfrm>
-            <a:off x="502920" y="1417320"/>
-            <a:ext cx="11201400" cy="1490472"/>
-          </a:xfrm>
-          <a:prstGeom prst="roundRect">
-            <a:avLst>
-              <a:gd name="adj" fmla="val 5521"/>
-            </a:avLst>
-          </a:prstGeom>
-          <a:solidFill>
-            <a:srgbClr val="FDF1EF"/>
-          </a:solidFill>
-          <a:ln w="15875">
-            <a:solidFill>
-              <a:srgbClr val="FBCEC9"/>
-            </a:solidFill>
-            <a:prstDash val="solid"/>
-          </a:ln>
-        </p:spPr>
-        <p:txBody>
-          <a:bodyPr/>
-          <a:p/>
-        </p:txBody>
-      </p:sp>
-      <p:sp>
-        <p:nvSpPr>
-          <p:cNvPr id="10" name="Text 7"/>
-          <p:cNvSpPr/>
-          <p:nvPr/>
-        </p:nvSpPr>
-        <p:spPr>
-          <a:xfrm>
-            <a:off x="722376" y="1472184"/>
-            <a:ext cx="10762488" cy="1380744"/>
-          </a:xfrm>
-          <a:prstGeom prst="rect">
-            <a:avLst/>
-          </a:prstGeom>
-          <a:noFill/>
-          <a:ln/>
-        </p:spPr>
-        <p:txBody>
-          <a:bodyPr wrap="square" lIns="0" tIns="0" rIns="0" bIns="0" rtlCol="0" anchor="ctr"/>
-          <a:lstStyle/>
-          <a:p>
-            <a:pPr indent="0" marL="0">
-              <a:buNone/>
-            </a:pPr>
-            <a:r>
-              <a:rPr lang="en-US" sz="1500" b="1" dirty="0">
-                <a:solidFill>
-                  <a:srgbClr val="AC4D33"/>
-                </a:solidFill>
-                <a:latin typeface="Calibri" pitchFamily="34" charset="0"/>
-                <a:ea typeface="Calibri" pitchFamily="34" charset="-122"/>
-                <a:cs typeface="Calibri" pitchFamily="34" charset="-120"/>
-              </a:rPr>
-              <a:t>Cấu trúc chuẩn</a:t>
-            </a:r>
-            <a:endParaRPr lang="en-US" sz="1500" dirty="0"/>
-          </a:p>
-          <a:p>
-            <a:pPr indent="0" marL="0">
-              <a:buNone/>
-            </a:pPr>
-            <a:r>
-              <a:rPr lang="en-US" sz="1300" dirty="0">
-                <a:solidFill>
-                  <a:srgbClr val="3A2B28"/>
-                </a:solidFill>
-                <a:latin typeface="Calibri" pitchFamily="34" charset="0"/>
-                <a:ea typeface="Calibri" pitchFamily="34" charset="-122"/>
-                <a:cs typeface="Calibri" pitchFamily="34" charset="-120"/>
-              </a:rPr>
-              <a:t>Tiêu đề thư/subject → lời chào → đoạn mở (lý do viết thư) → đoạn nội dung (thông tin, đề nghị cụ thể) → đoạn kết (mong muốn, lời cảm ơn) → chữ ký đầy đủ chức danh, đơn vị, liên hệ.</a:t>
-            </a:r>
-            <a:endParaRPr lang="en-US" sz="1500" dirty="0"/>
-          </a:p>
-        </p:txBody>
-      </p:sp>
-      <p:sp>
-        <p:nvSpPr>
-          <p:cNvPr id="11" name="Shape 8"/>
-          <p:cNvSpPr/>
-          <p:nvPr/>
-        </p:nvSpPr>
-        <p:spPr>
-          <a:xfrm>
-            <a:off x="502920" y="3072384"/>
-            <a:ext cx="11201400" cy="1490472"/>
-          </a:xfrm>
-          <a:prstGeom prst="roundRect">
-            <a:avLst>
-              <a:gd name="adj" fmla="val 5521"/>
-            </a:avLst>
-          </a:prstGeom>
-          <a:solidFill>
-            <a:srgbClr val="FDF1EF"/>
-          </a:solidFill>
-          <a:ln w="15875">
-            <a:solidFill>
-              <a:srgbClr val="FBCEC9"/>
-            </a:solidFill>
-            <a:prstDash val="solid"/>
-          </a:ln>
-        </p:spPr>
-        <p:txBody>
-          <a:bodyPr/>
-          <a:p/>
-        </p:txBody>
-      </p:sp>
-      <p:sp>
-        <p:nvSpPr>
-          <p:cNvPr id="12" name="Text 9"/>
-          <p:cNvSpPr/>
-          <p:nvPr/>
-        </p:nvSpPr>
-        <p:spPr>
-          <a:xfrm>
-            <a:off x="722376" y="3127248"/>
-            <a:ext cx="10762488" cy="1380744"/>
-          </a:xfrm>
-          <a:prstGeom prst="rect">
-            <a:avLst/>
-          </a:prstGeom>
-          <a:noFill/>
-          <a:ln/>
-        </p:spPr>
-        <p:txBody>
-          <a:bodyPr wrap="square" lIns="0" tIns="0" rIns="0" bIns="0" rtlCol="0" anchor="ctr"/>
-          <a:lstStyle/>
-          <a:p>
-            <a:pPr indent="0" marL="0">
-              <a:buNone/>
-            </a:pPr>
-            <a:r>
-              <a:rPr lang="en-US" sz="1500" b="1" dirty="0">
-                <a:solidFill>
-                  <a:srgbClr val="AC4D33"/>
-                </a:solidFill>
-                <a:latin typeface="Calibri" pitchFamily="34" charset="0"/>
-                <a:ea typeface="Calibri" pitchFamily="34" charset="-122"/>
-                <a:cs typeface="Calibri" pitchFamily="34" charset="-120"/>
-              </a:rPr>
-              <a:t>Áp dụng 5C</a:t>
-            </a:r>
-            <a:endParaRPr lang="en-US" sz="1500" dirty="0"/>
-          </a:p>
-          <a:p>
-            <a:pPr indent="0" marL="0">
-              <a:buNone/>
-            </a:pPr>
-            <a:r>
-              <a:rPr lang="en-US" sz="1300" dirty="0">
-                <a:solidFill>
-                  <a:srgbClr val="3A2B28"/>
-                </a:solidFill>
-                <a:latin typeface="Calibri" pitchFamily="34" charset="0"/>
-                <a:ea typeface="Calibri" pitchFamily="34" charset="-122"/>
-                <a:cs typeface="Calibri" pitchFamily="34" charset="-120"/>
-              </a:rPr>
-              <a:t>Clear: mỗi đoạn một ý • Concise: bỏ câu thừa, không vòng vo • Correct: đúng tên, chức danh, số liệu • Complete: đủ thông tin để bên kia hành động • Courteous: lịch sự cả khi khiếu nại.</a:t>
-            </a:r>
-            <a:endParaRPr lang="en-US" sz="1500" dirty="0"/>
-          </a:p>
-        </p:txBody>
-      </p:sp>
-      <p:sp>
-        <p:nvSpPr>
-          <p:cNvPr id="13" name="Shape 10"/>
-          <p:cNvSpPr/>
-          <p:nvPr/>
-        </p:nvSpPr>
-        <p:spPr>
-          <a:xfrm>
-            <a:off x="502920" y="4727448"/>
-            <a:ext cx="11201400" cy="1490472"/>
-          </a:xfrm>
-          <a:prstGeom prst="roundRect">
-            <a:avLst>
-              <a:gd name="adj" fmla="val 5521"/>
-            </a:avLst>
-          </a:prstGeom>
-          <a:solidFill>
-            <a:srgbClr val="FDF1EF"/>
-          </a:solidFill>
-          <a:ln w="15875">
-            <a:solidFill>
-              <a:srgbClr val="FBCEC9"/>
-            </a:solidFill>
-            <a:prstDash val="solid"/>
-          </a:ln>
-        </p:spPr>
-        <p:txBody>
-          <a:bodyPr/>
-          <a:p/>
-        </p:txBody>
-      </p:sp>
-      <p:sp>
-        <p:nvSpPr>
-          <p:cNvPr id="14" name="Text 11"/>
-          <p:cNvSpPr/>
-          <p:nvPr/>
-        </p:nvSpPr>
-        <p:spPr>
-          <a:xfrm>
-            <a:off x="722376" y="4782312"/>
-            <a:ext cx="10762488" cy="1380744"/>
-          </a:xfrm>
-          <a:prstGeom prst="rect">
-            <a:avLst/>
-          </a:prstGeom>
-          <a:noFill/>
-          <a:ln/>
-        </p:spPr>
-        <p:txBody>
-          <a:bodyPr wrap="square" lIns="0" tIns="0" rIns="0" bIns="0" rtlCol="0" anchor="ctr"/>
-          <a:lstStyle/>
-          <a:p>
-            <a:pPr indent="0" marL="0">
-              <a:buNone/>
-            </a:pPr>
-            <a:r>
-              <a:rPr lang="en-US" sz="1500" b="1" dirty="0">
-                <a:solidFill>
-                  <a:srgbClr val="AC4D33"/>
-                </a:solidFill>
-                <a:latin typeface="Calibri" pitchFamily="34" charset="0"/>
-                <a:ea typeface="Calibri" pitchFamily="34" charset="-122"/>
-                <a:cs typeface="Calibri" pitchFamily="34" charset="-120"/>
-              </a:rPr>
-              <a:t>Lỗi thường gặp</a:t>
-            </a:r>
-            <a:endParaRPr lang="en-US" sz="1500" dirty="0"/>
-          </a:p>
-          <a:p>
-            <a:pPr indent="0" marL="0">
-              <a:buNone/>
-            </a:pPr>
-            <a:r>
-              <a:rPr lang="en-US" sz="1300" dirty="0">
-                <a:solidFill>
-                  <a:srgbClr val="3A2B28"/>
-                </a:solidFill>
-                <a:latin typeface="Calibri" pitchFamily="34" charset="0"/>
-                <a:ea typeface="Calibri" pitchFamily="34" charset="-122"/>
-                <a:cs typeface="Calibri" pitchFamily="34" charset="-120"/>
-              </a:rPr>
-              <a:t>Tiêu đề chung chung (“Thư ngỏ”) • viết hoa cả câu để nhấn mạnh • dùng emoji, viết tắt kiểu chat • quên đính kèm tài liệu đã nhắc trong thư • đòi hỏi mà không nêu thời hạn.</a:t>
-            </a:r>
-            <a:endParaRPr lang="en-US" sz="1500" dirty="0"/>
+      <p:pic>
+        <p:nvPicPr>
+          <p:cNvPr id="9" name="Picture 8" descr="th3-thu-tin-thuong-mai-nt.png"/>
+          <p:cNvPicPr>
+            <a:picLocks noChangeAspect="1"/>
+          </p:cNvPicPr>
+          <p:nvPr/>
+        </p:nvPicPr>
+        <p:blipFill>
+          <a:blip r:embed="rId4"/>
+          <a:stretch>
+            <a:fillRect/>
+          </a:stretch>
+        </p:blipFill>
+        <p:spPr>
+          <a:xfrm>
+            <a:off x="834921" y="1713396"/>
+            <a:ext cx="10521852" cy="4245023"/>
+          </a:xfrm>
+          <a:prstGeom prst="rect">
+            <a:avLst/>
+          </a:prstGeom>
+        </p:spPr>
+      </p:pic>
+      <p:sp>
+        <p:nvSpPr>
+          <p:cNvPr id="10" name="TextBox 9"/>
+          <p:cNvSpPr txBox="1"/>
+          <p:nvPr/>
+        </p:nvSpPr>
+        <p:spPr>
+          <a:xfrm>
+            <a:off x="548640" y="6031571"/>
+            <a:ext cx="11109960" cy="310896"/>
+          </a:xfrm>
+          <a:prstGeom prst="rect">
+            <a:avLst/>
+          </a:prstGeom>
+          <a:noFill/>
+        </p:spPr>
+        <p:txBody>
+          <a:bodyPr wrap="square">
+            <a:spAutoFit/>
+          </a:bodyPr>
+          <a:lstStyle/>
+          <a:p>
+            <a:pPr algn="ctr"/>
+            <a:r>
+              <a:rPr sz="1150" i="1">
+                <a:solidFill>
+                  <a:srgbClr val="8A7A76"/>
+                </a:solidFill>
+                <a:latin typeface="Calibri"/>
+              </a:rPr>
+              <a:t>Đây chính là bố cục sinh viên phải gõ ra Word trong bài nộp số 3.</a:t>
+            </a:r>
           </a:p>
         </p:txBody>
       </p:sp>
@@ -5874,7 +5672,7 @@
       </p:grpSpPr>
       <p:pic>
         <p:nvPicPr>
-          <p:cNvPr id="2" name="Image 0" descr="assets/logo_tron.png">    </p:cNvPr>
+          <p:cNvPr id="2" name="Image 0" descr="/home/user/comdraft/assets/img/dau-huong.png">    </p:cNvPr>
           <p:cNvPicPr>
             <a:picLocks noChangeAspect="1"/>
           </p:cNvPicPr>
@@ -6497,7 +6295,7 @@
       </p:grpSpPr>
       <p:pic>
         <p:nvPicPr>
-          <p:cNvPr id="2" name="Image 0" descr="assets/logo_tron.png">    </p:cNvPr>
+          <p:cNvPr id="2" name="Image 0" descr="/home/user/comdraft/assets/img/dau-huong.png">    </p:cNvPr>
           <p:cNvPicPr>
             <a:picLocks noChangeAspect="1"/>
           </p:cNvPicPr>
@@ -6754,7 +6552,7 @@
         </p:blipFill>
         <p:spPr>
           <a:xfrm>
-            <a:off x="472287" y="1481328"/>
+            <a:off x="472287" y="2219134"/>
             <a:ext cx="11247120" cy="3233547"/>
           </a:xfrm>
           <a:prstGeom prst="rect">
@@ -6796,7 +6594,7 @@
       </p:grpSpPr>
       <p:pic>
         <p:nvPicPr>
-          <p:cNvPr id="2" name="Image 0" descr="assets/logo_tron.png">    </p:cNvPr>
+          <p:cNvPr id="2" name="Image 0" descr="/home/user/comdraft/assets/img/dau-huong.png">    </p:cNvPr>
           <p:cNvPicPr>
             <a:picLocks noChangeAspect="1"/>
           </p:cNvPicPr>
@@ -7332,7 +7130,7 @@
       </p:grpSpPr>
       <p:pic>
         <p:nvPicPr>
-          <p:cNvPr id="2" name="Image 0" descr="assets/logo_tron.png">    </p:cNvPr>
+          <p:cNvPr id="2" name="Image 0" descr="/home/user/comdraft/assets/img/dau-huong.png">    </p:cNvPr>
           <p:cNvPicPr>
             <a:picLocks noChangeAspect="1"/>
           </p:cNvPicPr>
@@ -8080,14 +7878,108 @@
     </a:clrScheme>
     <a:fontScheme name="Office">
       <a:majorFont>
-        <a:latin typeface="Cambria" panose="020F0302020204030204"/>
-        <a:ea typeface="Cambria"/>
-        <a:cs typeface="Cambria"/>
+        <a:latin typeface="Calibri Light" panose="020F0302020204030204"/>
+        <a:ea typeface=""/>
+        <a:cs typeface=""/>
+        <a:font script="Jpan" typeface="游ゴシック Light"/>
+        <a:font script="Hang" typeface="맑은 고딕"/>
+        <a:font script="Hans" typeface="等线 Light"/>
+        <a:font script="Hant" typeface="新細明體"/>
+        <a:font script="Arab" typeface="Times New Roman"/>
+        <a:font script="Hebr" typeface="Times New Roman"/>
+        <a:font script="Thai" typeface="Angsana New"/>
+        <a:font script="Ethi" typeface="Nyala"/>
+        <a:font script="Beng" typeface="Vrinda"/>
+        <a:font script="Gujr" typeface="Shruti"/>
+        <a:font script="Khmr" typeface="MoolBoran"/>
+        <a:font script="Knda" typeface="Tunga"/>
+        <a:font script="Guru" typeface="Raavi"/>
+        <a:font script="Cans" typeface="Euphemia"/>
+        <a:font script="Cher" typeface="Plantagenet Cherokee"/>
+        <a:font script="Yiii" typeface="Microsoft Yi Baiti"/>
+        <a:font script="Tibt" typeface="Microsoft Himalaya"/>
+        <a:font script="Thaa" typeface="MV Boli"/>
+        <a:font script="Deva" typeface="Mangal"/>
+        <a:font script="Telu" typeface="Gautami"/>
+        <a:font script="Taml" typeface="Latha"/>
+        <a:font script="Syrc" typeface="Estrangelo Edessa"/>
+        <a:font script="Orya" typeface="Kalinga"/>
+        <a:font script="Mlym" typeface="Kartika"/>
+        <a:font script="Laoo" typeface="DokChampa"/>
+        <a:font script="Sinh" typeface="Iskoola Pota"/>
+        <a:font script="Mong" typeface="Mongolian Baiti"/>
+        <a:font script="Viet" typeface="Times New Roman"/>
+        <a:font script="Uigh" typeface="Microsoft Uighur"/>
+        <a:font script="Geor" typeface="Sylfaen"/>
+        <a:font script="Armn" typeface="Arial"/>
+        <a:font script="Bugi" typeface="Leelawadee UI"/>
+        <a:font script="Bopo" typeface="Microsoft JhengHei"/>
+        <a:font script="Java" typeface="Javanese Text"/>
+        <a:font script="Lisu" typeface="Segoe UI"/>
+        <a:font script="Mymr" typeface="Myanmar Text"/>
+        <a:font script="Nkoo" typeface="Ebrima"/>
+        <a:font script="Olck" typeface="Nirmala UI"/>
+        <a:font script="Osma" typeface="Ebrima"/>
+        <a:font script="Phag" typeface="Phagspa"/>
+        <a:font script="Syrn" typeface="Estrangelo Edessa"/>
+        <a:font script="Syrj" typeface="Estrangelo Edessa"/>
+        <a:font script="Syre" typeface="Estrangelo Edessa"/>
+        <a:font script="Sora" typeface="Nirmala UI"/>
+        <a:font script="Tale" typeface="Microsoft Tai Le"/>
+        <a:font script="Talu" typeface="Microsoft New Tai Lue"/>
+        <a:font script="Tfng" typeface="Ebrima"/>
       </a:majorFont>
       <a:minorFont>
         <a:latin typeface="Calibri" panose="020F0502020204030204"/>
-        <a:ea typeface="Calibri"/>
-        <a:cs typeface="Calibri"/>
+        <a:ea typeface=""/>
+        <a:cs typeface=""/>
+        <a:font script="Jpan" typeface="游ゴシック"/>
+        <a:font script="Hang" typeface="맑은 고딕"/>
+        <a:font script="Hans" typeface="等线"/>
+        <a:font script="Hant" typeface="新細明體"/>
+        <a:font script="Arab" typeface="Arial"/>
+        <a:font script="Hebr" typeface="Arial"/>
+        <a:font script="Thai" typeface="Cordia New"/>
+        <a:font script="Ethi" typeface="Nyala"/>
+        <a:font script="Beng" typeface="Vrinda"/>
+        <a:font script="Gujr" typeface="Shruti"/>
+        <a:font script="Khmr" typeface="DaunPenh"/>
+        <a:font script="Knda" typeface="Tunga"/>
+        <a:font script="Guru" typeface="Raavi"/>
+        <a:font script="Cans" typeface="Euphemia"/>
+        <a:font script="Cher" typeface="Plantagenet Cherokee"/>
+        <a:font script="Yiii" typeface="Microsoft Yi Baiti"/>
+        <a:font script="Tibt" typeface="Microsoft Himalaya"/>
+        <a:font script="Thaa" typeface="MV Boli"/>
+        <a:font script="Deva" typeface="Mangal"/>
+        <a:font script="Telu" typeface="Gautami"/>
+        <a:font script="Taml" typeface="Latha"/>
+        <a:font script="Syrc" typeface="Estrangelo Edessa"/>
+        <a:font script="Orya" typeface="Kalinga"/>
+        <a:font script="Mlym" typeface="Kartika"/>
+        <a:font script="Laoo" typeface="DokChampa"/>
+        <a:font script="Sinh" typeface="Iskoola Pota"/>
+        <a:font script="Mong" typeface="Mongolian Baiti"/>
+        <a:font script="Viet" typeface="Arial"/>
+        <a:font script="Uigh" typeface="Microsoft Uighur"/>
+        <a:font script="Geor" typeface="Sylfaen"/>
+        <a:font script="Armn" typeface="Arial"/>
+        <a:font script="Bugi" typeface="Leelawadee UI"/>
+        <a:font script="Bopo" typeface="Microsoft JhengHei"/>
+        <a:font script="Java" typeface="Javanese Text"/>
+        <a:font script="Lisu" typeface="Segoe UI"/>
+        <a:font script="Mymr" typeface="Myanmar Text"/>
+        <a:font script="Nkoo" typeface="Ebrima"/>
+        <a:font script="Olck" typeface="Nirmala UI"/>
+        <a:font script="Osma" typeface="Ebrima"/>
+        <a:font script="Phag" typeface="Phagspa"/>
+        <a:font script="Syrn" typeface="Estrangelo Edessa"/>
+        <a:font script="Syrj" typeface="Estrangelo Edessa"/>
+        <a:font script="Syre" typeface="Estrangelo Edessa"/>
+        <a:font script="Sora" typeface="Nirmala UI"/>
+        <a:font script="Tale" typeface="Microsoft Tai Le"/>
+        <a:font script="Talu" typeface="Microsoft New Tai Lue"/>
+        <a:font script="Tfng" typeface="Ebrima"/>
       </a:minorFont>
     </a:fontScheme>
     <a:fmtScheme name="Office">

--- a/practice/bai-3-thuong-mai.pptx
+++ b/practice/bai-3-thuong-mai.pptx
@@ -1451,10 +1451,28 @@
           <a:lstStyle/>
           <a:p>
             <a:r>
-              <a:rPr lang="en-US" dirty="0"/>
-              <a:t/>
-            </a:r>
-            <a:endParaRPr lang="en-US" dirty="0"/>
+              <a:t>LÀM BÀI (30 phút)</a:t>
+            </a:r>
+          </a:p>
+          <a:p>
+            <a:r>
+              <a:t>• Mỗi cặp làm bộ hồ sơ; nhắc dùng lại tình huống của chính nhóm mình từ Chương 4.</a:t>
+            </a:r>
+          </a:p>
+          <a:p>
+            <a:r>
+              <a:t>• 20 phút soạn, 10 phút đổi hồ sơ với cặp khác và tìm lỗi.</a:t>
+            </a:r>
+          </a:p>
+          <a:p>
+            <a:r>
+              <a:t>• Yêu cầu mỗi cặp ghi ra 3 điểm bất lợi phát hiện được — đây là phần cô đánh giá tư duy.</a:t>
+            </a:r>
+          </a:p>
+          <a:p>
+            <a:r>
+              <a:t>• Chốt học phần: nhắc sinh viên lịch thi và phạm vi ôn tập.</a:t>
+            </a:r>
           </a:p>
         </p:txBody>
       </p:sp>

--- a/practice/bai-3-thuong-mai.pptx
+++ b/practice/bai-3-thuong-mai.pptx
@@ -2265,7 +2265,7 @@
                 <a:ea typeface="Calibri" pitchFamily="34" charset="-122"/>
                 <a:cs typeface="Calibri" pitchFamily="34" charset="-120"/>
               </a:rPr>
-              <a:t>Je m'appelle Huong  •  GV. Đỗ Thùy Hương  •  EC1103</a:t>
+              <a:t>Je m'appelle Huong  •  GV. Đỗ Thùy Hương  •  EC6000TX</a:t>
             </a:r>
             <a:endParaRPr lang="en-US" sz="900" dirty="0"/>
           </a:p>
@@ -2801,7 +2801,7 @@
                 <a:ea typeface="Calibri" pitchFamily="34" charset="-122"/>
                 <a:cs typeface="Calibri" pitchFamily="34" charset="-120"/>
               </a:rPr>
-              <a:t>Je m'appelle Huong  •  GV. Đỗ Thùy Hương  •  EC1103</a:t>
+              <a:t>Je m'appelle Huong  •  GV. Đỗ Thùy Hương  •  EC6000TX</a:t>
             </a:r>
             <a:endParaRPr lang="en-US" sz="900" dirty="0"/>
           </a:p>
@@ -3337,7 +3337,7 @@
                 <a:ea typeface="Calibri" pitchFamily="34" charset="-122"/>
                 <a:cs typeface="Calibri" pitchFamily="34" charset="-120"/>
               </a:rPr>
-              <a:t>Je m'appelle Huong  •  GV. Đỗ Thùy Hương  •  EC1103</a:t>
+              <a:t>Je m'appelle Huong  •  GV. Đỗ Thùy Hương  •  EC6000TX</a:t>
             </a:r>
             <a:endParaRPr lang="en-US" sz="900" dirty="0"/>
           </a:p>
@@ -3960,7 +3960,7 @@
                 <a:ea typeface="Calibri" pitchFamily="34" charset="-122"/>
                 <a:cs typeface="Calibri" pitchFamily="34" charset="-120"/>
               </a:rPr>
-              <a:t>Je m'appelle Huong  •  GV. Đỗ Thùy Hương  •  EC1103</a:t>
+              <a:t>Je m'appelle Huong  •  GV. Đỗ Thùy Hương  •  EC6000TX</a:t>
             </a:r>
             <a:endParaRPr lang="en-US" sz="900" dirty="0"/>
           </a:p>
@@ -4583,7 +4583,7 @@
                 <a:ea typeface="Calibri" pitchFamily="34" charset="-122"/>
                 <a:cs typeface="Calibri" pitchFamily="34" charset="-120"/>
               </a:rPr>
-              <a:t>Je m'appelle Huong  •  GV. Đỗ Thùy Hương  •  EC1103</a:t>
+              <a:t>Je m'appelle Huong  •  GV. Đỗ Thùy Hương  •  EC6000TX</a:t>
             </a:r>
             <a:endParaRPr lang="en-US" sz="900" dirty="0"/>
           </a:p>
@@ -5393,7 +5393,7 @@
                 <a:ea typeface="Calibri" pitchFamily="34" charset="-122"/>
                 <a:cs typeface="Calibri" pitchFamily="34" charset="-120"/>
               </a:rPr>
-              <a:t>Je m'appelle Huong  •  GV. Đỗ Thùy Hương  •  EC1103</a:t>
+              <a:t>Je m'appelle Huong  •  GV. Đỗ Thùy Hương  •  EC6000TX</a:t>
             </a:r>
             <a:endParaRPr lang="en-US" sz="900" dirty="0"/>
           </a:p>
@@ -5929,7 +5929,7 @@
                 <a:ea typeface="Calibri" pitchFamily="34" charset="-122"/>
                 <a:cs typeface="Calibri" pitchFamily="34" charset="-120"/>
               </a:rPr>
-              <a:t>Je m'appelle Huong  •  GV. Đỗ Thùy Hương  •  EC1103</a:t>
+              <a:t>Je m'appelle Huong  •  GV. Đỗ Thùy Hương  •  EC6000TX</a:t>
             </a:r>
             <a:endParaRPr lang="en-US" sz="900" dirty="0"/>
           </a:p>
@@ -6552,7 +6552,7 @@
                 <a:ea typeface="Calibri" pitchFamily="34" charset="-122"/>
                 <a:cs typeface="Calibri" pitchFamily="34" charset="-120"/>
               </a:rPr>
-              <a:t>Je m'appelle Huong  •  GV. Đỗ Thùy Hương  •  EC1103</a:t>
+              <a:t>Je m'appelle Huong  •  GV. Đỗ Thùy Hương  •  EC6000TX</a:t>
             </a:r>
             <a:endParaRPr lang="en-US" sz="900" dirty="0"/>
           </a:p>
@@ -6851,7 +6851,7 @@
                 <a:ea typeface="Calibri" pitchFamily="34" charset="-122"/>
                 <a:cs typeface="Calibri" pitchFamily="34" charset="-120"/>
               </a:rPr>
-              <a:t>Je m'appelle Huong  •  GV. Đỗ Thùy Hương  •  EC1103</a:t>
+              <a:t>Je m'appelle Huong  •  GV. Đỗ Thùy Hương  •  EC6000TX</a:t>
             </a:r>
             <a:endParaRPr lang="en-US" sz="900" dirty="0"/>
           </a:p>
@@ -7387,7 +7387,7 @@
                 <a:ea typeface="Calibri" pitchFamily="34" charset="-122"/>
                 <a:cs typeface="Calibri" pitchFamily="34" charset="-120"/>
               </a:rPr>
-              <a:t>Je m'appelle Huong  •  GV. Đỗ Thùy Hương  •  EC1103</a:t>
+              <a:t>Je m'appelle Huong  •  GV. Đỗ Thùy Hương  •  EC6000TX</a:t>
             </a:r>
             <a:endParaRPr lang="en-US" sz="900" dirty="0"/>
           </a:p>
